--- a/PINN_ppt.pptx
+++ b/PINN_ppt.pptx
@@ -2207,11 +2207,8 @@
             </a:endParaRPr>
           </a:p>
           <a:p>
-            <a:pPr marL="0" indent="0">
-              <a:buNone/>
-            </a:pPr>
-            <a:r>
-              <a:rPr lang="en-US" sz="1600" b="1" dirty="0" err="1">
+            <a:r>
+              <a:rPr lang="en-US" sz="1600" b="1" dirty="0">
                 <a:solidFill>
                   <a:srgbClr val="FFFFFF"/>
                 </a:solidFill>
@@ -2219,7 +2216,7 @@
                 <a:ea typeface="Calibri" pitchFamily="34" charset="-122"/>
                 <a:cs typeface="Calibri" pitchFamily="34" charset="-120"/>
               </a:rPr>
-              <a:t>david</a:t>
+              <a:t>dqliu@purdue.edu</a:t>
             </a:r>
             <a:endParaRPr lang="en-US" sz="1600" dirty="0"/>
           </a:p>
